--- a/templates/posts/november/23-11-2026-mon-ig-microscope-question.pptx
+++ b/templates/posts/november/23-11-2026-mon-ig-microscope-question.pptx
@@ -3912,7 +3912,7 @@
       </p:sp>
       <p:pic>
         <p:nvPicPr>
-          <p:cNvPr id="3" name="Picture 2" descr="9146137365279607704.jpg"/>
+          <p:cNvPr id="3" name="Picture 2" descr="1613636164798564107.jpg"/>
           <p:cNvPicPr>
             <a:picLocks noChangeAspect="1"/>
           </p:cNvPicPr>
